--- a/submissions/executive-briefing.pptx
+++ b/submissions/executive-briefing.pptx
@@ -714,7 +714,7 @@
       </p:grpSpPr>
       <p:sp>
         <p:nvSpPr>
-          <p:cNvPr id="51" name="Google Shape;51;SLIDES_API1592442512_0:notes"/>
+          <p:cNvPr id="51" name="Google Shape;51;SLIDES_API499582256_0:notes"/>
           <p:cNvSpPr/>
           <p:nvPr>
             <p:ph idx="2" type="sldImg"/>
@@ -749,7 +749,7 @@
       </p:sp>
       <p:sp>
         <p:nvSpPr>
-          <p:cNvPr id="52" name="Google Shape;52;SLIDES_API1592442512_0:notes"/>
+          <p:cNvPr id="52" name="Google Shape;52;SLIDES_API499582256_0:notes"/>
           <p:cNvSpPr txBox="1"/>
           <p:nvPr>
             <p:ph idx="1" type="body"/>
@@ -814,7 +814,7 @@
       </p:grpSpPr>
       <p:sp>
         <p:nvSpPr>
-          <p:cNvPr id="408" name="Google Shape;408;SLIDES_API1592442512_348:notes"/>
+          <p:cNvPr id="408" name="Google Shape;408;SLIDES_API499582256_348:notes"/>
           <p:cNvSpPr/>
           <p:nvPr>
             <p:ph idx="2" type="sldImg"/>
@@ -849,7 +849,7 @@
       </p:sp>
       <p:sp>
         <p:nvSpPr>
-          <p:cNvPr id="409" name="Google Shape;409;SLIDES_API1592442512_348:notes"/>
+          <p:cNvPr id="409" name="Google Shape;409;SLIDES_API499582256_348:notes"/>
           <p:cNvSpPr txBox="1"/>
           <p:nvPr>
             <p:ph idx="1" type="body"/>
@@ -914,7 +914,7 @@
       </p:grpSpPr>
       <p:sp>
         <p:nvSpPr>
-          <p:cNvPr id="73" name="Google Shape;73;SLIDES_API1592442512_21:notes"/>
+          <p:cNvPr id="73" name="Google Shape;73;SLIDES_API499582256_21:notes"/>
           <p:cNvSpPr/>
           <p:nvPr>
             <p:ph idx="2" type="sldImg"/>
@@ -949,7 +949,7 @@
       </p:sp>
       <p:sp>
         <p:nvSpPr>
-          <p:cNvPr id="74" name="Google Shape;74;SLIDES_API1592442512_21:notes"/>
+          <p:cNvPr id="74" name="Google Shape;74;SLIDES_API499582256_21:notes"/>
           <p:cNvSpPr txBox="1"/>
           <p:nvPr>
             <p:ph idx="1" type="body"/>
@@ -1014,7 +1014,7 @@
       </p:grpSpPr>
       <p:sp>
         <p:nvSpPr>
-          <p:cNvPr id="94" name="Google Shape;94;SLIDES_API1592442512_41:notes"/>
+          <p:cNvPr id="94" name="Google Shape;94;SLIDES_API499582256_41:notes"/>
           <p:cNvSpPr/>
           <p:nvPr>
             <p:ph idx="2" type="sldImg"/>
@@ -1049,7 +1049,7 @@
       </p:sp>
       <p:sp>
         <p:nvSpPr>
-          <p:cNvPr id="95" name="Google Shape;95;SLIDES_API1592442512_41:notes"/>
+          <p:cNvPr id="95" name="Google Shape;95;SLIDES_API499582256_41:notes"/>
           <p:cNvSpPr txBox="1"/>
           <p:nvPr>
             <p:ph idx="1" type="body"/>
@@ -1114,7 +1114,7 @@
       </p:grpSpPr>
       <p:sp>
         <p:nvSpPr>
-          <p:cNvPr id="140" name="Google Shape;140;SLIDES_API1592442512_86:notes"/>
+          <p:cNvPr id="140" name="Google Shape;140;SLIDES_API499582256_86:notes"/>
           <p:cNvSpPr/>
           <p:nvPr>
             <p:ph idx="2" type="sldImg"/>
@@ -1149,7 +1149,7 @@
       </p:sp>
       <p:sp>
         <p:nvSpPr>
-          <p:cNvPr id="141" name="Google Shape;141;SLIDES_API1592442512_86:notes"/>
+          <p:cNvPr id="141" name="Google Shape;141;SLIDES_API499582256_86:notes"/>
           <p:cNvSpPr txBox="1"/>
           <p:nvPr>
             <p:ph idx="1" type="body"/>
@@ -1214,7 +1214,7 @@
       </p:grpSpPr>
       <p:sp>
         <p:nvSpPr>
-          <p:cNvPr id="251" name="Google Shape;251;SLIDES_API1592442512_196:notes"/>
+          <p:cNvPr id="251" name="Google Shape;251;SLIDES_API499582256_196:notes"/>
           <p:cNvSpPr/>
           <p:nvPr>
             <p:ph idx="2" type="sldImg"/>
@@ -1249,7 +1249,7 @@
       </p:sp>
       <p:sp>
         <p:nvSpPr>
-          <p:cNvPr id="252" name="Google Shape;252;SLIDES_API1592442512_196:notes"/>
+          <p:cNvPr id="252" name="Google Shape;252;SLIDES_API499582256_196:notes"/>
           <p:cNvSpPr txBox="1"/>
           <p:nvPr>
             <p:ph idx="1" type="body"/>
@@ -1314,7 +1314,7 @@
       </p:grpSpPr>
       <p:sp>
         <p:nvSpPr>
-          <p:cNvPr id="269" name="Google Shape;269;SLIDES_API1592442512_213:notes"/>
+          <p:cNvPr id="269" name="Google Shape;269;SLIDES_API499582256_213:notes"/>
           <p:cNvSpPr/>
           <p:nvPr>
             <p:ph idx="2" type="sldImg"/>
@@ -1349,7 +1349,7 @@
       </p:sp>
       <p:sp>
         <p:nvSpPr>
-          <p:cNvPr id="270" name="Google Shape;270;SLIDES_API1592442512_213:notes"/>
+          <p:cNvPr id="270" name="Google Shape;270;SLIDES_API499582256_213:notes"/>
           <p:cNvSpPr txBox="1"/>
           <p:nvPr>
             <p:ph idx="1" type="body"/>
@@ -1414,7 +1414,7 @@
       </p:grpSpPr>
       <p:sp>
         <p:nvSpPr>
-          <p:cNvPr id="306" name="Google Shape;306;SLIDES_API1592442512_249:notes"/>
+          <p:cNvPr id="306" name="Google Shape;306;SLIDES_API499582256_249:notes"/>
           <p:cNvSpPr/>
           <p:nvPr>
             <p:ph idx="2" type="sldImg"/>
@@ -1449,7 +1449,7 @@
       </p:sp>
       <p:sp>
         <p:nvSpPr>
-          <p:cNvPr id="307" name="Google Shape;307;SLIDES_API1592442512_249:notes"/>
+          <p:cNvPr id="307" name="Google Shape;307;SLIDES_API499582256_249:notes"/>
           <p:cNvSpPr txBox="1"/>
           <p:nvPr>
             <p:ph idx="1" type="body"/>
@@ -1514,7 +1514,7 @@
       </p:grpSpPr>
       <p:sp>
         <p:nvSpPr>
-          <p:cNvPr id="324" name="Google Shape;324;SLIDES_API1592442512_266:notes"/>
+          <p:cNvPr id="324" name="Google Shape;324;SLIDES_API499582256_266:notes"/>
           <p:cNvSpPr/>
           <p:nvPr>
             <p:ph idx="2" type="sldImg"/>
@@ -1549,7 +1549,7 @@
       </p:sp>
       <p:sp>
         <p:nvSpPr>
-          <p:cNvPr id="325" name="Google Shape;325;SLIDES_API1592442512_266:notes"/>
+          <p:cNvPr id="325" name="Google Shape;325;SLIDES_API499582256_266:notes"/>
           <p:cNvSpPr txBox="1"/>
           <p:nvPr>
             <p:ph idx="1" type="body"/>
@@ -1614,7 +1614,7 @@
       </p:grpSpPr>
       <p:sp>
         <p:nvSpPr>
-          <p:cNvPr id="364" name="Google Shape;364;SLIDES_API1592442512_305:notes"/>
+          <p:cNvPr id="364" name="Google Shape;364;SLIDES_API499582256_305:notes"/>
           <p:cNvSpPr/>
           <p:nvPr>
             <p:ph idx="2" type="sldImg"/>
@@ -1649,7 +1649,7 @@
       </p:sp>
       <p:sp>
         <p:nvSpPr>
-          <p:cNvPr id="365" name="Google Shape;365;SLIDES_API1592442512_305:notes"/>
+          <p:cNvPr id="365" name="Google Shape;365;SLIDES_API499582256_305:notes"/>
           <p:cNvSpPr txBox="1"/>
           <p:nvPr>
             <p:ph idx="1" type="body"/>
@@ -7169,7 +7169,7 @@
         <p:spPr>
           <a:xfrm>
             <a:off x="6197600" y="1168400"/>
-            <a:ext cx="2387700" cy="254100"/>
+            <a:ext cx="2489100" cy="254100"/>
           </a:xfrm>
           <a:prstGeom prst="rect">
             <a:avLst/>
@@ -7896,8 +7896,8 @@
         </p:nvSpPr>
         <p:spPr>
           <a:xfrm>
-            <a:off x="584250" y="2146300"/>
-            <a:ext cx="1334100" cy="609600"/>
+            <a:off x="558800" y="2159050"/>
+            <a:ext cx="1269900" cy="584100"/>
           </a:xfrm>
           <a:prstGeom prst="rect">
             <a:avLst/>
@@ -7928,7 +7928,7 @@
                   <a:srgbClr val="FFFFFF"/>
                 </a:solidFill>
               </a:rPr>
-              <a:t>2. Name owners</a:t>
+              <a:t>2 Name owners</a:t>
             </a:r>
             <a:endParaRPr b="1" sz="1500">
               <a:solidFill>
@@ -8082,8 +8082,8 @@
         </p:nvSpPr>
         <p:spPr>
           <a:xfrm>
-            <a:off x="558800" y="3076525"/>
-            <a:ext cx="1269900" cy="609600"/>
+            <a:off x="558800" y="3067050"/>
+            <a:ext cx="1269900" cy="355500"/>
           </a:xfrm>
           <a:prstGeom prst="rect">
             <a:avLst/>
@@ -8114,7 +8114,7 @@
                   <a:srgbClr val="FFFFFF"/>
                 </a:solidFill>
               </a:rPr>
-              <a:t>3. Start delivery</a:t>
+              <a:t>3 Start delivery</a:t>
             </a:r>
             <a:endParaRPr b="1" sz="1500">
               <a:solidFill>
@@ -8268,7 +8268,7 @@
         </p:nvSpPr>
         <p:spPr>
           <a:xfrm>
-            <a:off x="584250" y="4006750"/>
+            <a:off x="584200" y="4076700"/>
             <a:ext cx="7975500" cy="406500"/>
           </a:xfrm>
           <a:prstGeom prst="rect">
@@ -8777,8 +8777,8 @@
         </p:nvSpPr>
         <p:spPr>
           <a:xfrm>
-            <a:off x="5638800" y="1193800"/>
-            <a:ext cx="1346100" cy="431700"/>
+            <a:off x="5591000" y="1193800"/>
+            <a:ext cx="1549500" cy="431700"/>
           </a:xfrm>
           <a:prstGeom prst="rect">
             <a:avLst/>
@@ -11241,8 +11241,8 @@
         </p:nvSpPr>
         <p:spPr>
           <a:xfrm>
-            <a:off x="584200" y="4216400"/>
-            <a:ext cx="7975500" cy="406500"/>
+            <a:off x="584250" y="4203600"/>
+            <a:ext cx="7975500" cy="482700"/>
           </a:xfrm>
           <a:prstGeom prst="rect">
             <a:avLst/>
@@ -18349,7 +18349,7 @@
         <p:spPr>
           <a:xfrm>
             <a:off x="609600" y="2514600"/>
-            <a:ext cx="2542500" cy="254100"/>
+            <a:ext cx="2561700" cy="254100"/>
           </a:xfrm>
           <a:prstGeom prst="rect">
             <a:avLst/>
@@ -19707,8 +19707,8 @@
         </p:nvSpPr>
         <p:spPr>
           <a:xfrm>
-            <a:off x="457200" y="4178300"/>
-            <a:ext cx="8229600" cy="470400"/>
+            <a:off x="457200" y="4203600"/>
+            <a:ext cx="8229600" cy="584400"/>
           </a:xfrm>
           <a:prstGeom prst="rect">
             <a:avLst/>
@@ -19750,8 +19750,8 @@
         </p:nvSpPr>
         <p:spPr>
           <a:xfrm>
-            <a:off x="584200" y="4140100"/>
-            <a:ext cx="7975500" cy="406500"/>
+            <a:off x="584250" y="4203600"/>
+            <a:ext cx="7975500" cy="304800"/>
           </a:xfrm>
           <a:prstGeom prst="rect">
             <a:avLst/>
